--- a/Logo.pptx
+++ b/Logo.pptx
@@ -104,6 +104,11 @@
       </a:defRPr>
     </a:lvl9pPr>
   </p:defaultTextStyle>
+  <p:extLst>
+    <p:ext uri="{EFAFB233-063F-42B5-8137-9DF3F51BA10A}">
+      <p15:sldGuideLst xmlns:p15="http://schemas.microsoft.com/office/powerpoint/2012/main"/>
+    </p:ext>
+  </p:extLst>
 </p:presentation>
 </file>
 
@@ -3438,10 +3443,10 @@
       </p:sp>
       <p:sp>
         <p:nvSpPr>
-          <p:cNvPr id="19" name="梯形 18">
-            <a:extLst>
-              <a:ext uri="{FF2B5EF4-FFF2-40B4-BE49-F238E27FC236}">
-                <a16:creationId xmlns:a16="http://schemas.microsoft.com/office/drawing/2014/main" id="{96769DEC-89E6-3A05-7888-9DDC32DCB555}"/>
+          <p:cNvPr id="5" name="橢圓 4">
+            <a:extLst>
+              <a:ext uri="{FF2B5EF4-FFF2-40B4-BE49-F238E27FC236}">
+                <a16:creationId xmlns:a16="http://schemas.microsoft.com/office/drawing/2014/main" id="{A8A89880-A84A-0CCC-9D37-EE45DF89E28B}"/>
               </a:ext>
             </a:extLst>
           </p:cNvPr>
@@ -3450,18 +3455,16 @@
         </p:nvSpPr>
         <p:spPr>
           <a:xfrm>
-            <a:off x="5321301" y="2762250"/>
-            <a:ext cx="1422974" cy="952500"/>
+            <a:off x="5327649" y="2317750"/>
+            <a:ext cx="1524000" cy="1524000"/>
           </a:xfrm>
-          <a:prstGeom prst="trapezoid">
-            <a:avLst>
-              <a:gd name="adj" fmla="val 8472"/>
-            </a:avLst>
+          <a:prstGeom prst="ellipse">
+            <a:avLst/>
           </a:prstGeom>
           <a:solidFill>
             <a:schemeClr val="bg1"/>
           </a:solidFill>
-          <a:ln w="6350">
+          <a:ln>
             <a:noFill/>
           </a:ln>
         </p:spPr>
@@ -3486,16 +3489,16 @@
           <a:lstStyle/>
           <a:p>
             <a:pPr algn="ctr"/>
-            <a:endParaRPr lang="zh-TW" altLang="en-US" dirty="0"/>
+            <a:endParaRPr lang="zh-TW" altLang="en-US"/>
           </a:p>
         </p:txBody>
       </p:sp>
       <p:pic>
         <p:nvPicPr>
-          <p:cNvPr id="23" name="圖形 22">
-            <a:extLst>
-              <a:ext uri="{FF2B5EF4-FFF2-40B4-BE49-F238E27FC236}">
-                <a16:creationId xmlns:a16="http://schemas.microsoft.com/office/drawing/2014/main" id="{4FC5DCEB-6DF8-AE2B-AEE4-AADD1FBE4CFE}"/>
+          <p:cNvPr id="3" name="圖形 2">
+            <a:extLst>
+              <a:ext uri="{FF2B5EF4-FFF2-40B4-BE49-F238E27FC236}">
+                <a16:creationId xmlns:a16="http://schemas.microsoft.com/office/drawing/2014/main" id="{642CE8D0-54FD-1EB5-AD2B-B3D5CE22695A}"/>
               </a:ext>
             </a:extLst>
           </p:cNvPr>
@@ -3518,8 +3521,8 @@
         </p:blipFill>
         <p:spPr>
           <a:xfrm>
-            <a:off x="0" y="-416791"/>
-            <a:ext cx="12192000" cy="6650182"/>
+            <a:off x="5242152" y="1751953"/>
+            <a:ext cx="1707696" cy="2403098"/>
           </a:xfrm>
           <a:prstGeom prst="rect">
             <a:avLst/>
